--- a/apps/resources/bundled_files/6-klass-koordinattar-sabak.pptx
+++ b/apps/resources/bundled_files/6-klass-koordinattar-sabak.pptx
@@ -5196,7 +5196,7 @@
                 </a:solidFill>
                 <a:latin typeface="PT Sans"/>
               </a:rPr>
-              <a:t>6-класс · Математика</a:t>
+              <a:t/>
             </a:r>
           </a:p>
         </p:txBody>
@@ -5688,7 +5688,7 @@
                 </a:solidFill>
                 <a:latin typeface="PT Sans"/>
               </a:rPr>
-              <a:t>6-класс ›</a:t>
+              <a:t/>
             </a:r>
           </a:p>
           <a:p>
@@ -6637,7 +6637,7 @@
                 </a:solidFill>
                 <a:latin typeface="PT Sans"/>
               </a:rPr>
-              <a:t>6-класс ›</a:t>
+              <a:t/>
             </a:r>
           </a:p>
           <a:p>
@@ -8969,7 +8969,7 @@
                 </a:solidFill>
                 <a:latin typeface="PT Sans"/>
               </a:rPr>
-              <a:t>6-класс ›</a:t>
+              <a:t/>
             </a:r>
           </a:p>
           <a:p>
@@ -12467,7 +12467,7 @@
                 </a:solidFill>
                 <a:latin typeface="PT Sans"/>
               </a:rPr>
-              <a:t>6-класс ›</a:t>
+              <a:t/>
             </a:r>
           </a:p>
           <a:p>
@@ -14050,7 +14050,7 @@
                 </a:solidFill>
                 <a:latin typeface="PT Sans"/>
               </a:rPr>
-              <a:t>6-класс ›</a:t>
+              <a:t/>
             </a:r>
           </a:p>
           <a:p>
@@ -14840,7 +14840,7 @@
                 </a:solidFill>
                 <a:latin typeface="PT Sans"/>
               </a:rPr>
-              <a:t>6-класс ›</a:t>
+              <a:t/>
             </a:r>
           </a:p>
           <a:p>
@@ -15669,7 +15669,7 @@
                 </a:solidFill>
                 <a:latin typeface="PT Sans"/>
               </a:rPr>
-              <a:t>6-класс ›</a:t>
+              <a:t/>
             </a:r>
           </a:p>
           <a:p>
@@ -17218,7 +17218,7 @@
                 </a:solidFill>
                 <a:latin typeface="PT Sans"/>
               </a:rPr>
-              <a:t>6-класс ›</a:t>
+              <a:t/>
             </a:r>
           </a:p>
           <a:p>
@@ -18302,7 +18302,7 @@
                 </a:solidFill>
                 <a:latin typeface="PT Sans"/>
               </a:rPr>
-              <a:t>6-класс ›</a:t>
+              <a:t/>
             </a:r>
           </a:p>
           <a:p>
@@ -19832,7 +19832,7 @@
                 </a:solidFill>
                 <a:latin typeface="PT Sans"/>
               </a:rPr>
-              <a:t>6-класс ›</a:t>
+              <a:t/>
             </a:r>
           </a:p>
           <a:p>
@@ -21701,7 +21701,7 @@
                 </a:solidFill>
                 <a:latin typeface="PT Sans"/>
               </a:rPr>
-              <a:t>6-класс ›</a:t>
+              <a:t/>
             </a:r>
           </a:p>
           <a:p>
@@ -22978,7 +22978,7 @@
                 </a:solidFill>
                 <a:latin typeface="PT Sans"/>
               </a:rPr>
-              <a:t>6-класс ›</a:t>
+              <a:t/>
             </a:r>
           </a:p>
           <a:p>
@@ -24406,7 +24406,7 @@
                 </a:solidFill>
                 <a:latin typeface="PT Sans"/>
               </a:rPr>
-              <a:t>6-класс ›</a:t>
+              <a:t/>
             </a:r>
           </a:p>
           <a:p>
@@ -25862,7 +25862,7 @@
                 </a:solidFill>
                 <a:latin typeface="PT Sans"/>
               </a:rPr>
-              <a:t>6-класс ›</a:t>
+              <a:t/>
             </a:r>
           </a:p>
           <a:p>
@@ -27158,7 +27158,7 @@
                 </a:solidFill>
                 <a:latin typeface="PT Sans"/>
               </a:rPr>
-              <a:t>6-класс ›</a:t>
+              <a:t/>
             </a:r>
           </a:p>
           <a:p>
@@ -27958,7 +27958,7 @@
                 </a:solidFill>
                 <a:latin typeface="PT Sans"/>
               </a:rPr>
-              <a:t>6-класс ›</a:t>
+              <a:t/>
             </a:r>
           </a:p>
           <a:p>
@@ -28799,7 +28799,7 @@
                 </a:solidFill>
                 <a:latin typeface="PT Sans"/>
               </a:rPr>
-              <a:t>6-класс ›</a:t>
+              <a:t/>
             </a:r>
           </a:p>
           <a:p>
@@ -29748,7 +29748,7 @@
                 </a:solidFill>
                 <a:latin typeface="PT Sans"/>
               </a:rPr>
-              <a:t>6-класс ›</a:t>
+              <a:t/>
             </a:r>
           </a:p>
           <a:p>
@@ -31202,7 +31202,7 @@
                 </a:solidFill>
                 <a:latin typeface="PT Sans"/>
               </a:rPr>
-              <a:t>6-класс ›</a:t>
+              <a:t/>
             </a:r>
           </a:p>
           <a:p>
@@ -31948,7 +31948,7 @@
                 </a:solidFill>
                 <a:latin typeface="PT Sans"/>
               </a:rPr>
-              <a:t>6-класс ›</a:t>
+              <a:t/>
             </a:r>
           </a:p>
           <a:p>
@@ -32756,7 +32756,7 @@
                 </a:solidFill>
                 <a:latin typeface="PT Sans"/>
               </a:rPr>
-              <a:t>6-класс ›</a:t>
+              <a:t/>
             </a:r>
           </a:p>
           <a:p>
@@ -33947,7 +33947,7 @@
                 </a:solidFill>
                 <a:latin typeface="PT Sans"/>
               </a:rPr>
-              <a:t>6-класс ›</a:t>
+              <a:t/>
             </a:r>
           </a:p>
           <a:p>
@@ -35126,7 +35126,7 @@
                 </a:solidFill>
                 <a:latin typeface="PT Sans"/>
               </a:rPr>
-              <a:t>6-класс ›</a:t>
+              <a:t/>
             </a:r>
           </a:p>
           <a:p>
@@ -35307,7 +35307,7 @@
                 </a:solidFill>
                 <a:latin typeface="PT Sans"/>
               </a:rPr>
-              <a:t>4-класс</a:t>
+              <a:t/>
             </a:r>
           </a:p>
         </p:txBody>
@@ -35487,7 +35487,7 @@
                 </a:solidFill>
                 <a:latin typeface="PT Sans"/>
               </a:rPr>
-              <a:t>5-класс</a:t>
+              <a:t/>
             </a:r>
           </a:p>
         </p:txBody>
@@ -35667,7 +35667,7 @@
                 </a:solidFill>
                 <a:latin typeface="PT Sans"/>
               </a:rPr>
-              <a:t>6-класс</a:t>
+              <a:t/>
             </a:r>
           </a:p>
         </p:txBody>
@@ -35903,7 +35903,7 @@
                 </a:solidFill>
                 <a:latin typeface="PT Sans"/>
               </a:rPr>
-              <a:t>7-класс</a:t>
+              <a:t/>
             </a:r>
           </a:p>
         </p:txBody>
@@ -36323,7 +36323,7 @@
                 </a:solidFill>
                 <a:latin typeface="PT Sans"/>
               </a:rPr>
-              <a:t>6-класс ›</a:t>
+              <a:t/>
             </a:r>
           </a:p>
           <a:p>
@@ -37471,7 +37471,7 @@
                 </a:solidFill>
                 <a:latin typeface="PT Sans"/>
               </a:rPr>
-              <a:t>6-класс ›</a:t>
+              <a:t/>
             </a:r>
           </a:p>
           <a:p>

--- a/apps/resources/bundled_files/6-klass-koordinattar-sabak.pptx
+++ b/apps/resources/bundled_files/6-klass-koordinattar-sabak.pptx
@@ -1582,7 +1582,7 @@
           <a:lstStyle/>
           <a:p>
             <a:r>
-              <a:t>Ой жүгүртүү маданияты (Wenxi Lee, 2.6).</a:t>
+              <a:t>Ой жүгүртүү маданияты (Wenxi Lee, 2,6).</a:t>
             </a:r>
           </a:p>
         </p:txBody>
@@ -1862,7 +1862,7 @@
           <a:lstStyle/>
           <a:p>
             <a:r>
-              <a:t>Жоопту дароо айтпайбыз. Жупта талкуулашат. Жооп: Жыпар: адегенде x (оңго же солго), анан y (өйдө же ылдый). Айбек x менен yтин ордун алмаштырды (М1).</a:t>
+              <a:t>Жоопту дароо айтпайбыз. Жупта талкуулашат. Жооп: Жыпар: адегенде x (оңго же солго), анан y (өйдө же ылдый). Айбек x менен утин ордун алмаштырды (М1).</a:t>
             </a:r>
           </a:p>
         </p:txBody>
@@ -16573,7 +16573,7 @@
                 </a:solidFill>
                 <a:latin typeface="PT Sans"/>
               </a:rPr>
-              <a:t>x – Aдан, y – Cдан</a:t>
+              <a:t>x – Адан, y – Сдан</a:t>
             </a:r>
           </a:p>
         </p:txBody>
@@ -26758,7 +26758,7 @@
                 </a:solidFill>
                 <a:latin typeface="PT Sans"/>
               </a:rPr>
-              <a:t>x – Aдан, y – Cдан</a:t>
+              <a:t>x – Адан, y – Сдан</a:t>
             </a:r>
           </a:p>
         </p:txBody>
